--- a/presentation/final_presentation.pptx
+++ b/presentation/final_presentation.pptx
@@ -3512,7 +3512,7 @@
           <a:lstStyle/>
           <a:p>
             <a:r>
-              <a:t>Final score: 93.1/100. Confidence: 95.5/100. Sources: 21. Figures: 14. LaTeX PDF and PPTX generated.</a:t>
+              <a:t>Final score: 93.1/100. Confidence: 97.0/100. Sources: 12. Figures: 14. LaTeX PDF and PPTX generated.</a:t>
             </a:r>
           </a:p>
         </p:txBody>

--- a/presentation/final_presentation.pptx
+++ b/presentation/final_presentation.pptx
@@ -3512,7 +3512,7 @@
           <a:lstStyle/>
           <a:p>
             <a:r>
-              <a:t>Final score: 93.1/100. Confidence: 97.0/100. Sources: 12. Figures: 14. LaTeX PDF and PPTX generated.</a:t>
+              <a:t>Final score: 93.1/100. Confidence: 95.5/100. Sources: 21. Figures: 14. LaTeX PDF and PPTX generated.</a:t>
             </a:r>
           </a:p>
         </p:txBody>

--- a/presentation/final_presentation.pptx
+++ b/presentation/final_presentation.pptx
@@ -3594,7 +3594,7 @@
         <p:spPr>
           <a:xfrm>
             <a:off x="548640" y="1645920"/>
-            <a:ext cx="8046720" cy="5588000"/>
+            <a:ext cx="8046720" cy="5532120"/>
           </a:xfrm>
           <a:prstGeom prst="rect">
             <a:avLst/>
@@ -3678,7 +3678,7 @@
         <p:spPr>
           <a:xfrm>
             <a:off x="548640" y="1645920"/>
-            <a:ext cx="8046720" cy="5588000"/>
+            <a:ext cx="8046720" cy="5532120"/>
           </a:xfrm>
           <a:prstGeom prst="rect">
             <a:avLst/>
@@ -3762,7 +3762,7 @@
         <p:spPr>
           <a:xfrm>
             <a:off x="548640" y="1645920"/>
-            <a:ext cx="8046720" cy="4023360"/>
+            <a:ext cx="8046720" cy="4172373"/>
           </a:xfrm>
           <a:prstGeom prst="rect">
             <a:avLst/>

--- a/presentation/final_presentation.pptx
+++ b/presentation/final_presentation.pptx
@@ -3152,7 +3152,7 @@
           </a:p>
           <a:p>
             <a:r>
-              <a:t>Topic: Multi-agent AI systems for trustworthy clinical decision support</a:t>
+              <a:t>Topic: Compare LangGraph, AutoGen, and CrewAI for evidence-grounded research workflows.</a:t>
             </a:r>
           </a:p>
         </p:txBody>
@@ -3392,7 +3392,7 @@
           <a:lstStyle/>
           <a:p>
             <a:r>
-              <a:t>GET /health; POST /run; GET /runs/{run_id}; GET /runs/{run_id}/report; GET /runs/{run_id}/presentation; GET /runs/{run_id}/figures.</a:t>
+              <a:t>GET /health; POST /run; GET /runs/{run_id}; GET /runs/{run_id}/report; GET /runs/{run_id}/report.pdf; GET /runs/{run_id}/presentation; GET /runs/{run_id}/figures.</a:t>
             </a:r>
           </a:p>
         </p:txBody>
